--- a/TutorConnect_Presentation.pptx
+++ b/TutorConnect_Presentation.pptx
@@ -6793,7 +6793,7 @@
                 <a:ea typeface="Calibri" pitchFamily="34" charset="-122"/>
                 <a:cs typeface="Calibri" pitchFamily="34" charset="-120"/>
               </a:rPr>
-              <a:t>Replaces ad-hoc word-of-mouth and group chats with one quality-controlled platform.</a:t>
+              <a:t>Complements the MSSC and Writing Center — scheduled, by-name peer tutoring across every subject, every hour.</a:t>
             </a:r>
             <a:endParaRPr lang="en-US" sz="1300" dirty="0"/>
           </a:p>
